--- a/media/resources/files/Ekvivalenettuuluk_BOP_iREETTOO_XjanaO.pptx
+++ b/media/resources/files/Ekvivalenettuuluk_BOP_iREETTOO_XjanaO.pptx
@@ -11578,7 +11578,7 @@
                 <a:ea typeface="+mn-ea"/>
                 <a:cs typeface="+mn-cs"/>
               </a:rPr>
-              <a:t>Турдуу пикирлер учун ыраазычылык билдиребиз.</a:t>
+              <a:t>Түрдүү пикирлер үчүн ыраазычылык билдиребиз.</a:t>
             </a:r>
           </a:p>
           <a:p>

--- a/media/resources/files/Ekvivalenettuuluk_BOP_iREETTOO_XjanaO.pptx
+++ b/media/resources/files/Ekvivalenettuuluk_BOP_iREETTOO_XjanaO.pptx
@@ -3477,7 +3477,7 @@
                 <a:ea typeface="+mn-ea"/>
                 <a:cs typeface="Arial" panose="020B0604020202020204" pitchFamily="34" charset="0"/>
               </a:rPr>
-              <a:t>Бөлчөктөрдү, ондуктарды жана пайыздарды иреттөө</a:t>
+              <a:t>Бөлчөктөрдү, ондуктарды жана пайыздарды ирээттөө</a:t>
             </a:r>
             <a:r>
               <a:rPr kumimoji="0" lang="en-US" sz="2000" b="0" i="0" u="sng" strike="noStrike" kern="1200" cap="none" spc="0" normalizeH="0" baseline="0" noProof="0" dirty="0">
@@ -3946,7 +3946,7 @@
                 <a:ea typeface="+mn-ea"/>
                 <a:cs typeface="Arial" panose="020B0604020202020204" pitchFamily="34" charset="0"/>
               </a:rPr>
-              <a:t>Мугалим үчүн жооп баракчасы жана таратма материалдар камтылган.</a:t>
+              <a:t>Мугалим үчүн жооп барагы жана таратма материалдар бар.</a:t>
             </a:r>
           </a:p>
           <a:p>
@@ -4015,7 +4015,7 @@
                 <a:ea typeface="+mn-ea"/>
                 <a:cs typeface="Arial" panose="020B0604020202020204" pitchFamily="34" charset="0"/>
               </a:rPr>
-              <a:t>Кайсы команда туура жооп бергенине жараша '</a:t>
+              <a:t>Туура жооп берген командага жараша «</a:t>
             </a:r>
             <a:r>
               <a:rPr kumimoji="0" lang="en-GB" sz="2000" b="0" i="0" u="sng" strike="noStrike" kern="1200" cap="none" spc="0" normalizeH="0" baseline="0" noProof="0" dirty="0">
@@ -4032,7 +4032,7 @@
                 <a:ea typeface="+mn-ea"/>
                 <a:cs typeface="Arial" panose="020B0604020202020204" pitchFamily="34" charset="0"/>
               </a:rPr>
-              <a:t>X' </a:t>
+              <a:t>X» </a:t>
             </a:r>
             <a:r>
               <a:rPr kumimoji="0" lang="ru-RU" sz="2000" b="0" i="0" u="sng" strike="noStrike" kern="1200" cap="none" spc="0" normalizeH="0" baseline="0" noProof="0" dirty="0">
@@ -4049,7 +4049,7 @@
                 <a:ea typeface="+mn-ea"/>
                 <a:cs typeface="Arial" panose="020B0604020202020204" pitchFamily="34" charset="0"/>
               </a:rPr>
-              <a:t>же '</a:t>
+              <a:t>же «</a:t>
             </a:r>
             <a:r>
               <a:rPr kumimoji="0" lang="en-GB" sz="2000" b="0" i="0" u="sng" strike="noStrike" kern="1200" cap="none" spc="0" normalizeH="0" baseline="0" noProof="0" dirty="0">
@@ -4066,7 +4066,7 @@
                 <a:ea typeface="+mn-ea"/>
                 <a:cs typeface="Arial" panose="020B0604020202020204" pitchFamily="34" charset="0"/>
               </a:rPr>
-              <a:t>O' </a:t>
+              <a:t>O» </a:t>
             </a:r>
             <a:r>
               <a:rPr kumimoji="0" lang="ru-RU" sz="2000" b="0" i="0" u="sng" strike="noStrike" kern="1200" cap="none" spc="0" normalizeH="0" baseline="0" noProof="0" dirty="0">
@@ -4083,7 +4083,7 @@
                 <a:ea typeface="+mn-ea"/>
                 <a:cs typeface="Arial" panose="020B0604020202020204" pitchFamily="34" charset="0"/>
               </a:rPr>
-              <a:t>баскычын басыңыз/тийип коюңуз</a:t>
+              <a:t>баскычын басыңыз</a:t>
             </a:r>
             <a:r>
               <a:rPr kumimoji="0" lang="en-GB" sz="2000" b="0" i="0" u="none" strike="noStrike" kern="1200" cap="none" spc="0" normalizeH="0" baseline="0" noProof="0" dirty="0">
@@ -4507,7 +4507,7 @@
               <a:rPr lang="ky-KG" sz="3200" b="1" dirty="0">
                 <a:latin typeface="Comic Sans MS" panose="030F0702030302020204" pitchFamily="66" charset="0"/>
               </a:rPr>
-              <a:t>жана пайыздарды иреттөө</a:t>
+              <a:t>жана пайыздарды ирээттөө</a:t>
             </a:r>
             <a:endParaRPr lang="en-GB" sz="3200" b="1" dirty="0">
               <a:latin typeface="Comic Sans MS" panose="030F0702030302020204" pitchFamily="66" charset="0"/>
